--- a/2 am/1 الجداول/cours 4/عرض الدرس.pptx
+++ b/2 am/1 الجداول/cours 4/عرض الدرس.pptx
@@ -203,7 +203,7 @@
           <a:p>
             <a:fld id="{04809ED0-CAD5-44E1-91E8-3616676F7223}" type="datetimeFigureOut">
               <a:rPr lang="fr-FR" smtClean="0"/>
-              <a:t>13/01/2025</a:t>
+              <a:t>15/01/2025</a:t>
             </a:fld>
             <a:endParaRPr lang="fr-FR"/>
           </a:p>
@@ -854,7 +854,7 @@
           <a:p>
             <a:fld id="{16B4F739-B7D4-4EFD-BF14-44542778AB9F}" type="datetimeFigureOut">
               <a:rPr lang="fr-FR" smtClean="0"/>
-              <a:t>13/01/2025</a:t>
+              <a:t>15/01/2025</a:t>
             </a:fld>
             <a:endParaRPr lang="fr-FR"/>
           </a:p>
@@ -1024,7 +1024,7 @@
           <a:p>
             <a:fld id="{16B4F739-B7D4-4EFD-BF14-44542778AB9F}" type="datetimeFigureOut">
               <a:rPr lang="fr-FR" smtClean="0"/>
-              <a:t>13/01/2025</a:t>
+              <a:t>15/01/2025</a:t>
             </a:fld>
             <a:endParaRPr lang="fr-FR"/>
           </a:p>
@@ -1204,7 +1204,7 @@
           <a:p>
             <a:fld id="{16B4F739-B7D4-4EFD-BF14-44542778AB9F}" type="datetimeFigureOut">
               <a:rPr lang="fr-FR" smtClean="0"/>
-              <a:t>13/01/2025</a:t>
+              <a:t>15/01/2025</a:t>
             </a:fld>
             <a:endParaRPr lang="fr-FR"/>
           </a:p>
@@ -1374,7 +1374,7 @@
           <a:p>
             <a:fld id="{16B4F739-B7D4-4EFD-BF14-44542778AB9F}" type="datetimeFigureOut">
               <a:rPr lang="fr-FR" smtClean="0"/>
-              <a:t>13/01/2025</a:t>
+              <a:t>15/01/2025</a:t>
             </a:fld>
             <a:endParaRPr lang="fr-FR"/>
           </a:p>
@@ -1620,7 +1620,7 @@
           <a:p>
             <a:fld id="{16B4F739-B7D4-4EFD-BF14-44542778AB9F}" type="datetimeFigureOut">
               <a:rPr lang="fr-FR" smtClean="0"/>
-              <a:t>13/01/2025</a:t>
+              <a:t>15/01/2025</a:t>
             </a:fld>
             <a:endParaRPr lang="fr-FR"/>
           </a:p>
@@ -1852,7 +1852,7 @@
           <a:p>
             <a:fld id="{16B4F739-B7D4-4EFD-BF14-44542778AB9F}" type="datetimeFigureOut">
               <a:rPr lang="fr-FR" smtClean="0"/>
-              <a:t>13/01/2025</a:t>
+              <a:t>15/01/2025</a:t>
             </a:fld>
             <a:endParaRPr lang="fr-FR"/>
           </a:p>
@@ -2219,7 +2219,7 @@
           <a:p>
             <a:fld id="{16B4F739-B7D4-4EFD-BF14-44542778AB9F}" type="datetimeFigureOut">
               <a:rPr lang="fr-FR" smtClean="0"/>
-              <a:t>13/01/2025</a:t>
+              <a:t>15/01/2025</a:t>
             </a:fld>
             <a:endParaRPr lang="fr-FR"/>
           </a:p>
@@ -2337,7 +2337,7 @@
           <a:p>
             <a:fld id="{16B4F739-B7D4-4EFD-BF14-44542778AB9F}" type="datetimeFigureOut">
               <a:rPr lang="fr-FR" smtClean="0"/>
-              <a:t>13/01/2025</a:t>
+              <a:t>15/01/2025</a:t>
             </a:fld>
             <a:endParaRPr lang="fr-FR"/>
           </a:p>
@@ -2432,7 +2432,7 @@
           <a:p>
             <a:fld id="{16B4F739-B7D4-4EFD-BF14-44542778AB9F}" type="datetimeFigureOut">
               <a:rPr lang="fr-FR" smtClean="0"/>
-              <a:t>13/01/2025</a:t>
+              <a:t>15/01/2025</a:t>
             </a:fld>
             <a:endParaRPr lang="fr-FR"/>
           </a:p>
@@ -2709,7 +2709,7 @@
           <a:p>
             <a:fld id="{16B4F739-B7D4-4EFD-BF14-44542778AB9F}" type="datetimeFigureOut">
               <a:rPr lang="fr-FR" smtClean="0"/>
-              <a:t>13/01/2025</a:t>
+              <a:t>15/01/2025</a:t>
             </a:fld>
             <a:endParaRPr lang="fr-FR"/>
           </a:p>
@@ -2962,7 +2962,7 @@
           <a:p>
             <a:fld id="{16B4F739-B7D4-4EFD-BF14-44542778AB9F}" type="datetimeFigureOut">
               <a:rPr lang="fr-FR" smtClean="0"/>
-              <a:t>13/01/2025</a:t>
+              <a:t>15/01/2025</a:t>
             </a:fld>
             <a:endParaRPr lang="fr-FR"/>
           </a:p>
@@ -3205,7 +3205,7 @@
           <a:p>
             <a:fld id="{16B4F739-B7D4-4EFD-BF14-44542778AB9F}" type="datetimeFigureOut">
               <a:rPr lang="fr-FR" smtClean="0"/>
-              <a:t>13/01/2025</a:t>
+              <a:t>15/01/2025</a:t>
             </a:fld>
             <a:endParaRPr lang="fr-FR"/>
           </a:p>
@@ -4358,16 +4358,7 @@
                 </a:solidFill>
                 <a:cs typeface="Times New Roman" panose="02020603050405020304" pitchFamily="18" charset="0"/>
               </a:rPr>
-              <a:t>1- دمج </a:t>
-            </a:r>
-            <a:r>
-              <a:rPr lang="ar-DZ" sz="4400" b="1" u="sng" dirty="0" smtClean="0">
-                <a:solidFill>
-                  <a:srgbClr val="FF0000"/>
-                </a:solidFill>
-                <a:cs typeface="Times New Roman" panose="02020603050405020304" pitchFamily="18" charset="0"/>
-              </a:rPr>
-              <a:t>الخلايا : </a:t>
+              <a:t>1- دمج الخلايا : </a:t>
             </a:r>
             <a:endParaRPr lang="fr-FR" sz="4400" dirty="0"/>
           </a:p>
@@ -4424,15 +4415,7 @@
                 <a:ea typeface="Times New Roman" panose="02020603050405020304" pitchFamily="18" charset="0"/>
                 <a:cs typeface="+mj-cs"/>
               </a:rPr>
-              <a:t> بإتباع </a:t>
-            </a:r>
-            <a:r>
-              <a:rPr lang="ar-DZ" sz="4400" b="1" dirty="0">
-                <a:latin typeface="Calibri" panose="020F0502020204030204" pitchFamily="34" charset="0"/>
-                <a:ea typeface="Times New Roman" panose="02020603050405020304" pitchFamily="18" charset="0"/>
-                <a:cs typeface="+mj-cs"/>
-              </a:rPr>
-              <a:t>ما </a:t>
+              <a:t> بإتباع ما </a:t>
             </a:r>
             <a:r>
               <a:rPr lang="ar-DZ" sz="4400" b="1" dirty="0" smtClean="0">
@@ -5238,14 +5221,39 @@
               </a:rPr>
               <a:t>أنجز جدولك التوقيت الأسبوعي في ملف وورد واحفظه على سطح المكتب معطيا له اسم  لقبك_اسمك_جدول_توقيت_2م1</a:t>
             </a:r>
-            <a:endParaRPr lang="ar-DZ" sz="4000" b="1" dirty="0">
-              <a:latin typeface="Calibri" panose="020F0502020204030204" pitchFamily="34" charset="0"/>
-              <a:ea typeface="Calibri" panose="020F0502020204030204" pitchFamily="34" charset="0"/>
-              <a:cs typeface="Times New Roman" panose="02020603050405020304" pitchFamily="18" charset="0"/>
-            </a:endParaRPr>
-          </a:p>
-        </p:txBody>
-      </p:sp>
+          </a:p>
+        </p:txBody>
+      </p:sp>
+      <p:pic>
+        <p:nvPicPr>
+          <p:cNvPr id="2" name="Image 1"/>
+          <p:cNvPicPr>
+            <a:picLocks noChangeAspect="1"/>
+          </p:cNvPicPr>
+          <p:nvPr/>
+        </p:nvPicPr>
+        <p:blipFill>
+          <a:blip r:embed="rId2">
+            <a:extLst>
+              <a:ext uri="{28A0092B-C50C-407E-A947-70E740481C1C}">
+                <a14:useLocalDpi xmlns:a14="http://schemas.microsoft.com/office/drawing/2010/main" val="0"/>
+              </a:ext>
+            </a:extLst>
+          </a:blip>
+          <a:stretch>
+            <a:fillRect/>
+          </a:stretch>
+        </p:blipFill>
+        <p:spPr>
+          <a:xfrm>
+            <a:off x="2876482" y="2752913"/>
+            <a:ext cx="6506058" cy="3754874"/>
+          </a:xfrm>
+          <a:prstGeom prst="rect">
+            <a:avLst/>
+          </a:prstGeom>
+        </p:spPr>
+      </p:pic>
     </p:spTree>
     <p:extLst>
       <p:ext uri="{BB962C8B-B14F-4D97-AF65-F5344CB8AC3E}">
